--- a/shiori-thumbnail/out/shiori_thumb_A.pptx
+++ b/shiori-thumbnail/out/shiori_thumb_A.pptx
@@ -3164,7 +3164,7 @@
               </a:lnSpc>
             </a:pPr>
             <a:r>
-              <a:rPr sz="2250" spc="300">
+              <a:rPr sz="2250" b="0" spc="300">
                 <a:solidFill>
                   <a:srgbClr val="FFFBF3"/>
                 </a:solidFill>
@@ -3179,14 +3179,14 @@
       </p:sp>
       <p:sp>
         <p:nvSpPr>
-          <p:cNvPr id="5" name="04_メインタイトル"/>
+          <p:cNvPr id="5" name="04_メインタイトル（1行目）"/>
           <p:cNvSpPr txBox="1"/>
           <p:nvPr/>
         </p:nvSpPr>
         <p:spPr>
           <a:xfrm rot="21360000">
-            <a:off x="666750" y="1219200"/>
-            <a:ext cx="9144000" cy="3143250"/>
+            <a:off x="666750" y="1428750"/>
+            <a:ext cx="8953500" cy="1238250"/>
           </a:xfrm>
           <a:prstGeom prst="rect">
             <a:avLst/>
@@ -3201,35 +3201,58 @@
           <a:p>
             <a:pPr algn="l">
               <a:lnSpc>
-                <a:spcPct val="104000"/>
+                <a:spcPct val="100000"/>
               </a:lnSpc>
             </a:pPr>
             <a:r>
-              <a:rPr sz="8400" spc="-300">
+              <a:rPr sz="8400" b="1" spc="-300">
                 <a:solidFill>
                   <a:srgbClr val="FFFBF3"/>
                 </a:solidFill>
-                <a:latin typeface="Zen Old Mincho Black"/>
-                <a:ea typeface="Zen Old Mincho Black"/>
-                <a:cs typeface="Zen Old Mincho Black"/>
+                <a:latin typeface="Zen Old Mincho"/>
+                <a:ea typeface="Zen Old Mincho"/>
+                <a:cs typeface="Zen Old Mincho"/>
               </a:rPr>
               <a:t>絵を描きたくなる</a:t>
             </a:r>
           </a:p>
-          <a:p>
-            <a:pPr algn="l" marL="1619250">
+        </p:txBody>
+      </p:sp>
+      <p:sp>
+        <p:nvSpPr>
+          <p:cNvPr id="6" name="05_メインタイトル（2行目）"/>
+          <p:cNvSpPr txBox="1"/>
+          <p:nvPr/>
+        </p:nvSpPr>
+        <p:spPr>
+          <a:xfrm rot="21360000">
+            <a:off x="2247900" y="2705100"/>
+            <a:ext cx="6667500" cy="1714500"/>
+          </a:xfrm>
+          <a:prstGeom prst="rect">
+            <a:avLst/>
+          </a:prstGeom>
+          <a:noFill/>
+        </p:spPr>
+        <p:txBody>
+          <a:bodyPr wrap="none" lIns="0" rIns="0" tIns="0" bIns="0" anchor="t">
+            <a:noAutofit/>
+          </a:bodyPr>
+          <a:lstStyle/>
+          <a:p>
+            <a:pPr algn="l">
               <a:lnSpc>
-                <a:spcPct val="104000"/>
+                <a:spcPct val="100000"/>
               </a:lnSpc>
             </a:pPr>
             <a:r>
-              <a:rPr sz="11700" spc="-300">
+              <a:rPr sz="11700" b="1" spc="-300">
                 <a:solidFill>
                   <a:srgbClr val="FFFBF3"/>
                 </a:solidFill>
-                <a:latin typeface="Zen Old Mincho Black"/>
-                <a:ea typeface="Zen Old Mincho Black"/>
-                <a:cs typeface="Zen Old Mincho Black"/>
+                <a:latin typeface="Zen Old Mincho"/>
+                <a:ea typeface="Zen Old Mincho"/>
+                <a:cs typeface="Zen Old Mincho"/>
               </a:rPr>
               <a:t>喫茶店!</a:t>
             </a:r>
@@ -3238,13 +3261,13 @@
       </p:sp>
       <p:cxnSp>
         <p:nvCxnSpPr>
-          <p:cNvPr id="6" name="05_装飾線（琥珀のアンダーライン）"/>
+          <p:cNvPr id="7" name="06_装飾線（琥珀のアンダーライン）"/>
           <p:cNvCxnSpPr/>
           <p:nvPr/>
         </p:nvCxnSpPr>
         <p:spPr>
           <a:xfrm flipV="1">
-            <a:off x="2495550" y="4267200"/>
+            <a:off x="2495550" y="4457700"/>
             <a:ext cx="4171950" cy="285750"/>
           </a:xfrm>
           <a:prstGeom prst="line">

--- a/shiori-thumbnail/out/shiori_thumb_A.pptx
+++ b/shiori-thumbnail/out/shiori_thumb_A.pptx
@@ -3209,9 +3209,9 @@
                 <a:solidFill>
                   <a:srgbClr val="FFFBF3"/>
                 </a:solidFill>
-                <a:latin typeface="Zen Old Mincho"/>
-                <a:ea typeface="Zen Old Mincho"/>
-                <a:cs typeface="Zen Old Mincho"/>
+                <a:latin typeface="Shippori Mincho"/>
+                <a:ea typeface="Shippori Mincho"/>
+                <a:cs typeface="Shippori Mincho"/>
               </a:rPr>
               <a:t>絵を描きたくなる</a:t>
             </a:r>
@@ -3250,9 +3250,9 @@
                 <a:solidFill>
                   <a:srgbClr val="FFFBF3"/>
                 </a:solidFill>
-                <a:latin typeface="Zen Old Mincho"/>
-                <a:ea typeface="Zen Old Mincho"/>
-                <a:cs typeface="Zen Old Mincho"/>
+                <a:latin typeface="Shippori Mincho"/>
+                <a:ea typeface="Shippori Mincho"/>
+                <a:cs typeface="Shippori Mincho"/>
               </a:rPr>
               <a:t>喫茶店!</a:t>
             </a:r>
